--- a/public/study/cse513/downloads/week-10.pptx
+++ b/public/study/cse513/downloads/week-10.pptx
@@ -1658,7 +1658,7 @@
           <a:lstStyle xmlns:a="http://schemas.openxmlformats.org/drawingml/2006/main"/>
           <a:p xmlns:a="http://schemas.openxmlformats.org/drawingml/2006/main">
             <a:r>
-              <a:t>A local1, send2 yapar; B independent local1 yapar, A’dan timestamp2 mesajını receive edince3 olur. B sonra local4 yapar. A’nın send2 ve B’nin local1 event’i concurrent’tir;1&lt;2 causal yön kanıtı değildir. Send2→receive3 ise message bağımlılığıyla kanıtlıdır. Satır sırası teaching trace’in simülatör sırasıdır; bütün olaylar için tek global causal sıra varsaymayız.</a:t>
+              <a:t>A local1, send2 yapar; B independent local1 yapar, A’dan timestamp2 mesajını receive edince3 olur. B sonra local4 yapar. A’nın send2 ve B’nin local1 event’i concurrent’tir;1&lt;2 causal yön kanıtı değildir. Send2→receive3 ise message bağımlılığıyla kanıtlıdır. Satır sırası teaching trace’in simülatör sırasıdır; bütün olaylar için tek global causal sıra varsaymayız. Bu tablo ve Python lab, tek mesajlı concurrency karşı örneğidir. GIF ve etkileşimli model ayrı, iki mesajlı bir alıştırmadır: A.local → A.send(m1) → B.receive(m1) → B.local → B.send(m2) → A.receive(m2). Bu ikinci iz A=6, B=5 ile biter ve olayları bir causal zincir oluşturur; concurrent event çiftine örnek değildir.</a:t>
             </a:r>
           </a:p>
           <a:p xmlns:a="http://schemas.openxmlformats.org/drawingml/2006/main">
